--- a/classes/parte-16-capstones-y-preparacion-de-certificaciones/310-plan-de-aprendizaje-continuo-y-comunidad/clase-310-presentacion.pptx
+++ b/classes/parte-16-capstones-y-preparacion-de-certificaciones/310-plan-de-aprendizaje-continuo-y-comunidad/clase-310-presentacion.pptx
@@ -17,6 +17,10 @@
     <p:sldId id="265" r:id="rId16"/>
     <p:sldId id="266" r:id="rId17"/>
     <p:sldId id="267" r:id="rId18"/>
+    <p:sldId id="268" r:id="rId19"/>
+    <p:sldId id="269" r:id="rId20"/>
+    <p:sldId id="270" r:id="rId21"/>
+    <p:sldId id="271" r:id="rId22"/>
   </p:sldIdLst>
   <p:sldSz cx="9144000" cy="6858000" type="screen4x3"/>
   <p:notesSz cx="6858000" cy="9144000"/>
@@ -3198,7 +3202,7 @@
                   <a:srgbClr val="0B3D2E"/>
                 </a:solidFill>
               </a:rPr>
-              <a:t>⚠️ Errores comunes</a:t>
+              <a:t>🧪 Laboratorio guiado (ejercicio aplicado)</a:t>
             </a:r>
           </a:p>
         </p:txBody>
@@ -3236,67 +3240,97 @@
                   <a:srgbClr val="22282E"/>
                 </a:solidFill>
               </a:rPr>
-              <a:t>•  "Me satura la información" — Fuentes sin curar; filtra a 10 de calidad y usa RSS.</a:t>
-            </a:r>
-          </a:p>
-          <a:p>
-            <a:pPr>
-              <a:spcAft>
-                <a:spcPts val="600"/>
-              </a:spcAft>
-            </a:pPr>
-            <a:r>
-              <a:rPr sz="1500">
-                <a:solidFill>
-                  <a:srgbClr val="22282E"/>
-                </a:solidFill>
-              </a:rPr>
-              <a:t>•  "Empecé fuerte y lo dejé" — Cadencia irreal; reduce a bloques sostenibles y constantes.</a:t>
-            </a:r>
-          </a:p>
-          <a:p>
-            <a:pPr>
-              <a:spcAft>
-                <a:spcPts val="600"/>
-              </a:spcAft>
-            </a:pPr>
-            <a:r>
-              <a:rPr sz="1500">
-                <a:solidFill>
-                  <a:srgbClr val="22282E"/>
-                </a:solidFill>
-              </a:rPr>
-              <a:t>•  "Estudio sin rumbo" — Sin especialización; elige un rol NICE y profundiza.</a:t>
-            </a:r>
-          </a:p>
-          <a:p>
-            <a:pPr>
-              <a:spcAft>
-                <a:spcPts val="600"/>
-              </a:spcAft>
-            </a:pPr>
-            <a:r>
-              <a:rPr sz="1500">
-                <a:solidFill>
-                  <a:srgbClr val="22282E"/>
-                </a:solidFill>
-              </a:rPr>
-              <a:t>•  "No participo en comunidad" — Aislamiento; entra a un Discord/meetup y aporta algo pequeño.</a:t>
-            </a:r>
-          </a:p>
-          <a:p>
-            <a:pPr>
-              <a:spcAft>
-                <a:spcPts val="600"/>
-              </a:spcAft>
-            </a:pPr>
-            <a:r>
-              <a:rPr sz="1500">
-                <a:solidFill>
-                  <a:srgbClr val="22282E"/>
-                </a:solidFill>
-              </a:rPr>
-              <a:t>•  "Me quemé" — Sin límites; agenda descansos y protege tu tiempo personal.</a:t>
+              <a:t>•  Curación de fuentes. Selecciona 8–12 fuentes fiables (blogs de investigadores, avisos oficiales, newsletters, MITRE/OWASP) y agrégalas en tu lector RSS.</a:t>
+            </a:r>
+          </a:p>
+          <a:p>
+            <a:pPr>
+              <a:spcAft>
+                <a:spcPts val="600"/>
+              </a:spcAft>
+            </a:pPr>
+            <a:r>
+              <a:rPr sz="1500">
+                <a:solidFill>
+                  <a:srgbClr val="22282E"/>
+                </a:solidFill>
+              </a:rPr>
+              <a:t>•  Define tu cadencia. Fija bloques semanales realistas: p. ej. 3 h de práctica (HTB/THM), 1 h de lectura, 1 h de escritura.</a:t>
+            </a:r>
+          </a:p>
+          <a:p>
+            <a:pPr>
+              <a:spcAft>
+                <a:spcPts val="600"/>
+              </a:spcAft>
+            </a:pPr>
+            <a:r>
+              <a:rPr sz="1500">
+                <a:solidFill>
+                  <a:srgbClr val="22282E"/>
+                </a:solidFill>
+              </a:rPr>
+              <a:t>•  Plan trimestral. Elige un objetivo por trimestre (una certificación, una especialización, N máquinas) con métrica verificable.</a:t>
+            </a:r>
+          </a:p>
+          <a:p>
+            <a:pPr>
+              <a:spcAft>
+                <a:spcPts val="600"/>
+              </a:spcAft>
+            </a:pPr>
+            <a:r>
+              <a:rPr sz="1500">
+                <a:solidFill>
+                  <a:srgbClr val="22282E"/>
+                </a:solidFill>
+              </a:rPr>
+              <a:t>•  Únete a una comunidad. Entra a un Discord/meetup y participa: pregunta, responde, comparte un writeup.</a:t>
+            </a:r>
+          </a:p>
+          <a:p>
+            <a:pPr>
+              <a:spcAft>
+                <a:spcPts val="600"/>
+              </a:spcAft>
+            </a:pPr>
+            <a:r>
+              <a:rPr sz="1500">
+                <a:solidFill>
+                  <a:srgbClr val="22282E"/>
+                </a:solidFill>
+              </a:rPr>
+              <a:t>•  Planifica una contribución. Define un aporte a 90 días: un post técnico, una charla en un BSides local o un PR a una herramienta open source.</a:t>
+            </a:r>
+          </a:p>
+          <a:p>
+            <a:pPr>
+              <a:spcAft>
+                <a:spcPts val="600"/>
+              </a:spcAft>
+            </a:pPr>
+            <a:r>
+              <a:rPr sz="1500">
+                <a:solidFill>
+                  <a:srgbClr val="22282E"/>
+                </a:solidFill>
+              </a:rPr>
+              <a:t>•  Traza tu especialización. Con el NICE Framework, elige un rol objetivo (p. ej. Exploitation Analyst, Cyber Defense Analyst) y lista las competencias a profundizar.</a:t>
+            </a:r>
+          </a:p>
+          <a:p>
+            <a:pPr>
+              <a:spcAft>
+                <a:spcPts val="600"/>
+              </a:spcAft>
+            </a:pPr>
+            <a:r>
+              <a:rPr sz="1500">
+                <a:solidFill>
+                  <a:srgbClr val="22282E"/>
+                </a:solidFill>
+              </a:rPr>
+              <a:t>•  Diseña sostenibilidad. Define límites (horarios, descansos) para prevenir burnout; el plan debe durar años, no semanas.</a:t>
             </a:r>
           </a:p>
         </p:txBody>
@@ -3347,7 +3381,7 @@
                   <a:srgbClr val="0B3D2E"/>
                 </a:solidFill>
               </a:rPr>
-              <a:t>❓ Preguntas frecuentes</a:t>
+              <a:t>✍️ Ejercicios</a:t>
             </a:r>
           </a:p>
         </p:txBody>
@@ -3385,97 +3419,82 @@
                   <a:srgbClr val="22282E"/>
                 </a:solidFill>
               </a:rPr>
-              <a:t>•  ❓ ¿Cómo evito ahogarme en noticias?</a:t>
-            </a:r>
-          </a:p>
-          <a:p>
-            <a:pPr>
-              <a:spcAft>
-                <a:spcPts val="600"/>
-              </a:spcAft>
-            </a:pPr>
-            <a:r>
-              <a:rPr sz="1500">
-                <a:solidFill>
-                  <a:srgbClr val="22282E"/>
-                </a:solidFill>
-              </a:rPr>
-              <a:t>•  Cura pocas fuentes de alta señal y revisa en bloques fijos, no de forma continua.</a:t>
-            </a:r>
-          </a:p>
-          <a:p>
-            <a:pPr>
-              <a:spcAft>
-                <a:spcPts val="600"/>
-              </a:spcAft>
-            </a:pPr>
-            <a:r>
-              <a:rPr sz="1500">
-                <a:solidFill>
-                  <a:srgbClr val="22282E"/>
-                </a:solidFill>
-              </a:rPr>
-              <a:t>•  ❓ ¿Especializarme o ser generalista?</a:t>
-            </a:r>
-          </a:p>
-          <a:p>
-            <a:pPr>
-              <a:spcAft>
-                <a:spcPts val="600"/>
-              </a:spcAft>
-            </a:pPr>
-            <a:r>
-              <a:rPr sz="1500">
-                <a:solidFill>
-                  <a:srgbClr val="22282E"/>
-                </a:solidFill>
-              </a:rPr>
-              <a:t>•  Construye una base amplia (lo hiciste en las Partes 1–15) y luego profundiza en un rol. La profundidad diferencia.</a:t>
-            </a:r>
-          </a:p>
-          <a:p>
-            <a:pPr>
-              <a:spcAft>
-                <a:spcPts val="600"/>
-              </a:spcAft>
-            </a:pPr>
-            <a:r>
-              <a:rPr sz="1500">
-                <a:solidFill>
-                  <a:srgbClr val="22282E"/>
-                </a:solidFill>
-              </a:rPr>
-              <a:t>•  ❓ ¿Vale la pena contribuir si soy junior?</a:t>
-            </a:r>
-          </a:p>
-          <a:p>
-            <a:pPr>
-              <a:spcAft>
-                <a:spcPts val="600"/>
-              </a:spcAft>
-            </a:pPr>
-            <a:r>
-              <a:rPr sz="1500">
-                <a:solidFill>
-                  <a:srgbClr val="22282E"/>
-                </a:solidFill>
-              </a:rPr>
-              <a:t>•  Sí. Escribir un writeup o reportar un bug en una herramienta consolida tu aprendizaje y te da visibilidad.</a:t>
-            </a:r>
-          </a:p>
-          <a:p>
-            <a:pPr>
-              <a:spcAft>
-                <a:spcPts val="600"/>
-              </a:spcAft>
-            </a:pPr>
-            <a:r>
-              <a:rPr sz="1500">
-                <a:solidFill>
-                  <a:srgbClr val="22282E"/>
-                </a:solidFill>
-              </a:rPr>
-              <a:t>•  ❓ ¿Y ahora que terminé el programa?</a:t>
+              <a:t>•  Construye tu lista curada de 10 fuentes con su justificación.</a:t>
+            </a:r>
+          </a:p>
+          <a:p>
+            <a:pPr>
+              <a:spcAft>
+                <a:spcPts val="600"/>
+              </a:spcAft>
+            </a:pPr>
+            <a:r>
+              <a:rPr sz="1500">
+                <a:solidFill>
+                  <a:srgbClr val="22282E"/>
+                </a:solidFill>
+              </a:rPr>
+              <a:t>•  Diseña tu calendario semanal de práctica.</a:t>
+            </a:r>
+          </a:p>
+          <a:p>
+            <a:pPr>
+              <a:spcAft>
+                <a:spcPts val="600"/>
+              </a:spcAft>
+            </a:pPr>
+            <a:r>
+              <a:rPr sz="1500">
+                <a:solidFill>
+                  <a:srgbClr val="22282E"/>
+                </a:solidFill>
+              </a:rPr>
+              <a:t>•  Redacta tu plan trimestral con objetivo y métrica.</a:t>
+            </a:r>
+          </a:p>
+          <a:p>
+            <a:pPr>
+              <a:spcAft>
+                <a:spcPts val="600"/>
+              </a:spcAft>
+            </a:pPr>
+            <a:r>
+              <a:rPr sz="1500">
+                <a:solidFill>
+                  <a:srgbClr val="22282E"/>
+                </a:solidFill>
+              </a:rPr>
+              <a:t>•  Únete a una comunidad y documenta tu primera contribución.</a:t>
+            </a:r>
+          </a:p>
+          <a:p>
+            <a:pPr>
+              <a:spcAft>
+                <a:spcPts val="600"/>
+              </a:spcAft>
+            </a:pPr>
+            <a:r>
+              <a:rPr sz="1500">
+                <a:solidFill>
+                  <a:srgbClr val="22282E"/>
+                </a:solidFill>
+              </a:rPr>
+              <a:t>•  Mapea tu rol objetivo con el NICE Framework.</a:t>
+            </a:r>
+          </a:p>
+          <a:p>
+            <a:pPr>
+              <a:spcAft>
+                <a:spcPts val="600"/>
+              </a:spcAft>
+            </a:pPr>
+            <a:r>
+              <a:rPr sz="1500">
+                <a:solidFill>
+                  <a:srgbClr val="22282E"/>
+                </a:solidFill>
+              </a:rPr>
+              <a:t>•  Escribe tu "regla de sostenibilidad" personal contra el burnout.</a:t>
             </a:r>
           </a:p>
         </p:txBody>
@@ -3526,7 +3545,7 @@
                   <a:srgbClr val="0B3D2E"/>
                 </a:solidFill>
               </a:rPr>
-              <a:t>🔗 Referencias</a:t>
+              <a:t>📝 Reto verificable</a:t>
             </a:r>
           </a:p>
         </p:txBody>
@@ -3564,6 +3583,438 @@
                   <a:srgbClr val="22282E"/>
                 </a:solidFill>
               </a:rPr>
+              <a:t>•  Entrega un plan de aprendizaje continuo (plan-aprendizaje.md) con: fuentes curadas, cadencia semanal, objetivos trimestrales a 12 meses con métricas, un compromiso de contribución a 90 días, tu ruta…</a:t>
+            </a:r>
+          </a:p>
+          <a:p>
+            <a:pPr>
+              <a:spcAft>
+                <a:spcPts val="600"/>
+              </a:spcAft>
+            </a:pPr>
+            <a:r>
+              <a:rPr sz="1500">
+                <a:solidFill>
+                  <a:srgbClr val="22282E"/>
+                </a:solidFill>
+              </a:rPr>
+              <a:t>•  Criterio de aceptación: el plan tiene fechas y métricas verificables (no intenciones vagas), incluye al menos una contribución concreta a la comunidad, mapea una especialización a un rol real y…</a:t>
+            </a:r>
+          </a:p>
+        </p:txBody>
+      </p:sp>
+    </p:spTree>
+  </p:cSld>
+  <p:clrMapOvr>
+    <a:masterClrMapping/>
+  </p:clrMapOvr>
+</p:sld>
+</file>
+
+<file path=ppt/slides/slide13.xml><?xml version="1.0" encoding="utf-8"?>
+<p:sld xmlns:a="http://schemas.openxmlformats.org/drawingml/2006/main" xmlns:p="http://schemas.openxmlformats.org/presentationml/2006/main" xmlns:r="http://schemas.openxmlformats.org/officeDocument/2006/relationships">
+  <p:cSld>
+    <p:spTree>
+      <p:nvGrpSpPr>
+        <p:cNvPr id="1" name=""/>
+        <p:cNvGrpSpPr/>
+        <p:nvPr/>
+      </p:nvGrpSpPr>
+      <p:grpSpPr/>
+      <p:sp>
+        <p:nvSpPr>
+          <p:cNvPr id="2" name="TextBox 1"/>
+          <p:cNvSpPr txBox="1"/>
+          <p:nvPr/>
+        </p:nvSpPr>
+        <p:spPr>
+          <a:xfrm>
+            <a:off x="457200" y="320040"/>
+            <a:ext cx="8229600" cy="822960"/>
+          </a:xfrm>
+          <a:prstGeom prst="rect">
+            <a:avLst/>
+          </a:prstGeom>
+          <a:noFill/>
+        </p:spPr>
+        <p:txBody>
+          <a:bodyPr wrap="square">
+            <a:spAutoFit/>
+          </a:bodyPr>
+          <a:lstStyle/>
+          <a:p>
+            <a:r>
+              <a:rPr sz="2600" b="1">
+                <a:solidFill>
+                  <a:srgbClr val="0B3D2E"/>
+                </a:solidFill>
+              </a:rPr>
+              <a:t>⚠️ Errores comunes</a:t>
+            </a:r>
+          </a:p>
+        </p:txBody>
+      </p:sp>
+      <p:sp>
+        <p:nvSpPr>
+          <p:cNvPr id="3" name="TextBox 2"/>
+          <p:cNvSpPr txBox="1"/>
+          <p:nvPr/>
+        </p:nvSpPr>
+        <p:spPr>
+          <a:xfrm>
+            <a:off x="457200" y="1280160"/>
+            <a:ext cx="8229600" cy="4937760"/>
+          </a:xfrm>
+          <a:prstGeom prst="rect">
+            <a:avLst/>
+          </a:prstGeom>
+          <a:noFill/>
+        </p:spPr>
+        <p:txBody>
+          <a:bodyPr wrap="square">
+            <a:spAutoFit/>
+          </a:bodyPr>
+          <a:lstStyle/>
+          <a:p>
+            <a:pPr>
+              <a:spcAft>
+                <a:spcPts val="600"/>
+              </a:spcAft>
+            </a:pPr>
+            <a:r>
+              <a:rPr sz="1500">
+                <a:solidFill>
+                  <a:srgbClr val="22282E"/>
+                </a:solidFill>
+              </a:rPr>
+              <a:t>•  "Me satura la información" — Fuentes sin curar; filtra a 10 de calidad y usa RSS.</a:t>
+            </a:r>
+          </a:p>
+          <a:p>
+            <a:pPr>
+              <a:spcAft>
+                <a:spcPts val="600"/>
+              </a:spcAft>
+            </a:pPr>
+            <a:r>
+              <a:rPr sz="1500">
+                <a:solidFill>
+                  <a:srgbClr val="22282E"/>
+                </a:solidFill>
+              </a:rPr>
+              <a:t>•  "Empecé fuerte y lo dejé" — Cadencia irreal; reduce a bloques sostenibles y constantes.</a:t>
+            </a:r>
+          </a:p>
+          <a:p>
+            <a:pPr>
+              <a:spcAft>
+                <a:spcPts val="600"/>
+              </a:spcAft>
+            </a:pPr>
+            <a:r>
+              <a:rPr sz="1500">
+                <a:solidFill>
+                  <a:srgbClr val="22282E"/>
+                </a:solidFill>
+              </a:rPr>
+              <a:t>•  "Estudio sin rumbo" — Sin especialización; elige un rol NICE y profundiza.</a:t>
+            </a:r>
+          </a:p>
+          <a:p>
+            <a:pPr>
+              <a:spcAft>
+                <a:spcPts val="600"/>
+              </a:spcAft>
+            </a:pPr>
+            <a:r>
+              <a:rPr sz="1500">
+                <a:solidFill>
+                  <a:srgbClr val="22282E"/>
+                </a:solidFill>
+              </a:rPr>
+              <a:t>•  "No participo en comunidad" — Aislamiento; entra a un Discord/meetup y aporta algo pequeño.</a:t>
+            </a:r>
+          </a:p>
+          <a:p>
+            <a:pPr>
+              <a:spcAft>
+                <a:spcPts val="600"/>
+              </a:spcAft>
+            </a:pPr>
+            <a:r>
+              <a:rPr sz="1500">
+                <a:solidFill>
+                  <a:srgbClr val="22282E"/>
+                </a:solidFill>
+              </a:rPr>
+              <a:t>•  "Me quemé" — Sin límites; agenda descansos y protege tu tiempo personal.</a:t>
+            </a:r>
+          </a:p>
+        </p:txBody>
+      </p:sp>
+    </p:spTree>
+  </p:cSld>
+  <p:clrMapOvr>
+    <a:masterClrMapping/>
+  </p:clrMapOvr>
+</p:sld>
+</file>
+
+<file path=ppt/slides/slide14.xml><?xml version="1.0" encoding="utf-8"?>
+<p:sld xmlns:a="http://schemas.openxmlformats.org/drawingml/2006/main" xmlns:p="http://schemas.openxmlformats.org/presentationml/2006/main" xmlns:r="http://schemas.openxmlformats.org/officeDocument/2006/relationships">
+  <p:cSld>
+    <p:spTree>
+      <p:nvGrpSpPr>
+        <p:cNvPr id="1" name=""/>
+        <p:cNvGrpSpPr/>
+        <p:nvPr/>
+      </p:nvGrpSpPr>
+      <p:grpSpPr/>
+      <p:sp>
+        <p:nvSpPr>
+          <p:cNvPr id="2" name="TextBox 1"/>
+          <p:cNvSpPr txBox="1"/>
+          <p:nvPr/>
+        </p:nvSpPr>
+        <p:spPr>
+          <a:xfrm>
+            <a:off x="457200" y="320040"/>
+            <a:ext cx="8229600" cy="822960"/>
+          </a:xfrm>
+          <a:prstGeom prst="rect">
+            <a:avLst/>
+          </a:prstGeom>
+          <a:noFill/>
+        </p:spPr>
+        <p:txBody>
+          <a:bodyPr wrap="square">
+            <a:spAutoFit/>
+          </a:bodyPr>
+          <a:lstStyle/>
+          <a:p>
+            <a:r>
+              <a:rPr sz="2600" b="1">
+                <a:solidFill>
+                  <a:srgbClr val="0B3D2E"/>
+                </a:solidFill>
+              </a:rPr>
+              <a:t>❓ Preguntas frecuentes</a:t>
+            </a:r>
+          </a:p>
+        </p:txBody>
+      </p:sp>
+      <p:sp>
+        <p:nvSpPr>
+          <p:cNvPr id="3" name="TextBox 2"/>
+          <p:cNvSpPr txBox="1"/>
+          <p:nvPr/>
+        </p:nvSpPr>
+        <p:spPr>
+          <a:xfrm>
+            <a:off x="457200" y="1280160"/>
+            <a:ext cx="8229600" cy="4937760"/>
+          </a:xfrm>
+          <a:prstGeom prst="rect">
+            <a:avLst/>
+          </a:prstGeom>
+          <a:noFill/>
+        </p:spPr>
+        <p:txBody>
+          <a:bodyPr wrap="square">
+            <a:spAutoFit/>
+          </a:bodyPr>
+          <a:lstStyle/>
+          <a:p>
+            <a:pPr>
+              <a:spcAft>
+                <a:spcPts val="600"/>
+              </a:spcAft>
+            </a:pPr>
+            <a:r>
+              <a:rPr sz="1500">
+                <a:solidFill>
+                  <a:srgbClr val="22282E"/>
+                </a:solidFill>
+              </a:rPr>
+              <a:t>•  ❓ ¿Cómo evito ahogarme en noticias?</a:t>
+            </a:r>
+          </a:p>
+          <a:p>
+            <a:pPr>
+              <a:spcAft>
+                <a:spcPts val="600"/>
+              </a:spcAft>
+            </a:pPr>
+            <a:r>
+              <a:rPr sz="1500">
+                <a:solidFill>
+                  <a:srgbClr val="22282E"/>
+                </a:solidFill>
+              </a:rPr>
+              <a:t>•  Cura pocas fuentes de alta señal y revisa en bloques fijos, no de forma continua.</a:t>
+            </a:r>
+          </a:p>
+          <a:p>
+            <a:pPr>
+              <a:spcAft>
+                <a:spcPts val="600"/>
+              </a:spcAft>
+            </a:pPr>
+            <a:r>
+              <a:rPr sz="1500">
+                <a:solidFill>
+                  <a:srgbClr val="22282E"/>
+                </a:solidFill>
+              </a:rPr>
+              <a:t>•  ❓ ¿Especializarme o ser generalista?</a:t>
+            </a:r>
+          </a:p>
+          <a:p>
+            <a:pPr>
+              <a:spcAft>
+                <a:spcPts val="600"/>
+              </a:spcAft>
+            </a:pPr>
+            <a:r>
+              <a:rPr sz="1500">
+                <a:solidFill>
+                  <a:srgbClr val="22282E"/>
+                </a:solidFill>
+              </a:rPr>
+              <a:t>•  Construye una base amplia (lo hiciste en las Partes 1–15) y luego profundiza en un rol. La profundidad diferencia.</a:t>
+            </a:r>
+          </a:p>
+          <a:p>
+            <a:pPr>
+              <a:spcAft>
+                <a:spcPts val="600"/>
+              </a:spcAft>
+            </a:pPr>
+            <a:r>
+              <a:rPr sz="1500">
+                <a:solidFill>
+                  <a:srgbClr val="22282E"/>
+                </a:solidFill>
+              </a:rPr>
+              <a:t>•  ❓ ¿Vale la pena contribuir si soy junior?</a:t>
+            </a:r>
+          </a:p>
+          <a:p>
+            <a:pPr>
+              <a:spcAft>
+                <a:spcPts val="600"/>
+              </a:spcAft>
+            </a:pPr>
+            <a:r>
+              <a:rPr sz="1500">
+                <a:solidFill>
+                  <a:srgbClr val="22282E"/>
+                </a:solidFill>
+              </a:rPr>
+              <a:t>•  Sí. Escribir un writeup o reportar un bug en una herramienta consolida tu aprendizaje y te da visibilidad.</a:t>
+            </a:r>
+          </a:p>
+          <a:p>
+            <a:pPr>
+              <a:spcAft>
+                <a:spcPts val="600"/>
+              </a:spcAft>
+            </a:pPr>
+            <a:r>
+              <a:rPr sz="1500">
+                <a:solidFill>
+                  <a:srgbClr val="22282E"/>
+                </a:solidFill>
+              </a:rPr>
+              <a:t>•  ❓ ¿Y ahora que terminé el programa?</a:t>
+            </a:r>
+          </a:p>
+        </p:txBody>
+      </p:sp>
+    </p:spTree>
+  </p:cSld>
+  <p:clrMapOvr>
+    <a:masterClrMapping/>
+  </p:clrMapOvr>
+</p:sld>
+</file>
+
+<file path=ppt/slides/slide15.xml><?xml version="1.0" encoding="utf-8"?>
+<p:sld xmlns:a="http://schemas.openxmlformats.org/drawingml/2006/main" xmlns:p="http://schemas.openxmlformats.org/presentationml/2006/main" xmlns:r="http://schemas.openxmlformats.org/officeDocument/2006/relationships">
+  <p:cSld>
+    <p:spTree>
+      <p:nvGrpSpPr>
+        <p:cNvPr id="1" name=""/>
+        <p:cNvGrpSpPr/>
+        <p:nvPr/>
+      </p:nvGrpSpPr>
+      <p:grpSpPr/>
+      <p:sp>
+        <p:nvSpPr>
+          <p:cNvPr id="2" name="TextBox 1"/>
+          <p:cNvSpPr txBox="1"/>
+          <p:nvPr/>
+        </p:nvSpPr>
+        <p:spPr>
+          <a:xfrm>
+            <a:off x="457200" y="320040"/>
+            <a:ext cx="8229600" cy="822960"/>
+          </a:xfrm>
+          <a:prstGeom prst="rect">
+            <a:avLst/>
+          </a:prstGeom>
+          <a:noFill/>
+        </p:spPr>
+        <p:txBody>
+          <a:bodyPr wrap="square">
+            <a:spAutoFit/>
+          </a:bodyPr>
+          <a:lstStyle/>
+          <a:p>
+            <a:r>
+              <a:rPr sz="2600" b="1">
+                <a:solidFill>
+                  <a:srgbClr val="0B3D2E"/>
+                </a:solidFill>
+              </a:rPr>
+              <a:t>🔗 Referencias</a:t>
+            </a:r>
+          </a:p>
+        </p:txBody>
+      </p:sp>
+      <p:sp>
+        <p:nvSpPr>
+          <p:cNvPr id="3" name="TextBox 2"/>
+          <p:cNvSpPr txBox="1"/>
+          <p:nvPr/>
+        </p:nvSpPr>
+        <p:spPr>
+          <a:xfrm>
+            <a:off x="457200" y="1280160"/>
+            <a:ext cx="8229600" cy="4937760"/>
+          </a:xfrm>
+          <a:prstGeom prst="rect">
+            <a:avLst/>
+          </a:prstGeom>
+          <a:noFill/>
+        </p:spPr>
+        <p:txBody>
+          <a:bodyPr wrap="square">
+            <a:spAutoFit/>
+          </a:bodyPr>
+          <a:lstStyle/>
+          <a:p>
+            <a:pPr>
+              <a:spcAft>
+                <a:spcPts val="600"/>
+              </a:spcAft>
+            </a:pPr>
+            <a:r>
+              <a:rPr sz="1500">
+                <a:solidFill>
+                  <a:srgbClr val="22282E"/>
+                </a:solidFill>
+              </a:rPr>
               <a:t>•  NICE Framework (NIST): &lt;https://niccs.cisa.gov/workforce-development/nice-framework&gt;</a:t>
             </a:r>
           </a:p>
@@ -3629,6 +4080,81 @@
           </a:p>
         </p:txBody>
       </p:sp>
+    </p:spTree>
+  </p:cSld>
+  <p:clrMapOvr>
+    <a:masterClrMapping/>
+  </p:clrMapOvr>
+</p:sld>
+</file>
+
+<file path=ppt/slides/slide16.xml><?xml version="1.0" encoding="utf-8"?>
+<p:sld xmlns:a="http://schemas.openxmlformats.org/drawingml/2006/main" xmlns:p="http://schemas.openxmlformats.org/presentationml/2006/main" xmlns:r="http://schemas.openxmlformats.org/officeDocument/2006/relationships">
+  <p:cSld>
+    <p:spTree>
+      <p:nvGrpSpPr>
+        <p:cNvPr id="1" name=""/>
+        <p:cNvGrpSpPr/>
+        <p:nvPr/>
+      </p:nvGrpSpPr>
+      <p:grpSpPr/>
+      <p:sp>
+        <p:nvSpPr>
+          <p:cNvPr id="2" name="TextBox 1"/>
+          <p:cNvSpPr txBox="1"/>
+          <p:nvPr/>
+        </p:nvSpPr>
+        <p:spPr>
+          <a:xfrm>
+            <a:off x="457200" y="274320"/>
+            <a:ext cx="8229600" cy="640080"/>
+          </a:xfrm>
+          <a:prstGeom prst="rect">
+            <a:avLst/>
+          </a:prstGeom>
+          <a:noFill/>
+        </p:spPr>
+        <p:txBody>
+          <a:bodyPr wrap="square">
+            <a:spAutoFit/>
+          </a:bodyPr>
+          <a:lstStyle/>
+          <a:p>
+            <a:r>
+              <a:rPr sz="2200" b="1">
+                <a:solidFill>
+                  <a:srgbClr val="0B3D2E"/>
+                </a:solidFill>
+              </a:rPr>
+              <a:t>Diagrama de la clase</a:t>
+            </a:r>
+          </a:p>
+        </p:txBody>
+      </p:sp>
+      <p:pic>
+        <p:nvPicPr>
+          <p:cNvPr id="3" name="Picture 2" descr="0187520714cd67bb.png"/>
+          <p:cNvPicPr>
+            <a:picLocks noChangeAspect="1"/>
+          </p:cNvPicPr>
+          <p:nvPr/>
+        </p:nvPicPr>
+        <p:blipFill>
+          <a:blip r:embed="rId2"/>
+          <a:stretch>
+            <a:fillRect/>
+          </a:stretch>
+        </p:blipFill>
+        <p:spPr>
+          <a:xfrm>
+            <a:off x="457200" y="3307267"/>
+            <a:ext cx="8229600" cy="883546"/>
+          </a:xfrm>
+          <a:prstGeom prst="rect">
+            <a:avLst/>
+          </a:prstGeom>
+        </p:spPr>
+      </p:pic>
     </p:spTree>
   </p:cSld>
   <p:clrMapOvr>
@@ -3713,7 +4239,7 @@
                   <a:srgbClr val="22282E"/>
                 </a:solidFill>
               </a:rPr>
-              <a:t>•  Cerrar el programa con un plan de aprendizaje continuo que sostenga tu carrera durante años: fuentes de calidad, una cadencia de práctica, participación en comunidad, contribución (charlas, blog, open source) y una hoja de ruta de especialización. La ciberseguridad cambia constantemente; el verdadero resultado del curso no es "terminar", sino saber cómo seguir aprendiendo de forma disciplinada y con red de apoyo.</a:t>
+              <a:t>•  Cerrar el programa con un plan de aprendizaje continuo que sostenga tu carrera durante años: fuentes de calidad, una cadencia de práctica, participación en comunidad, contribución (charlas, blog…</a:t>
             </a:r>
           </a:p>
         </p:txBody>
@@ -4107,7 +4633,7 @@
                   <a:srgbClr val="0B3D2E"/>
                 </a:solidFill>
               </a:rPr>
-              <a:t>📖 Definiciones y características</a:t>
+              <a:t>🧠 Explicación en profundidad</a:t>
             </a:r>
           </a:p>
         </p:txBody>
@@ -4145,82 +4671,22 @@
                   <a:srgbClr val="22282E"/>
                 </a:solidFill>
               </a:rPr>
-              <a:t>•  Aprendizaje continuo: hábito estructurado de estudio y práctica permanente. Característica: cadencia sostenible, no maratones esporádicos.</a:t>
-            </a:r>
-          </a:p>
-          <a:p>
-            <a:pPr>
-              <a:spcAft>
-                <a:spcPts val="600"/>
-              </a:spcAft>
-            </a:pPr>
-            <a:r>
-              <a:rPr sz="1500">
-                <a:solidFill>
-                  <a:srgbClr val="22282E"/>
-                </a:solidFill>
-              </a:rPr>
-              <a:t>•  NICE Framework: taxonomía de roles y competencias de ciberseguridad (NIST). Característica: ayuda a mapear tu especialización.</a:t>
-            </a:r>
-          </a:p>
-          <a:p>
-            <a:pPr>
-              <a:spcAft>
-                <a:spcPts val="600"/>
-              </a:spcAft>
-            </a:pPr>
-            <a:r>
-              <a:rPr sz="1500">
-                <a:solidFill>
-                  <a:srgbClr val="22282E"/>
-                </a:solidFill>
-              </a:rPr>
-              <a:t>•  CTF (Capture The Flag): competición de retos técnicos. Característica: práctica gamificada y comunitaria.</a:t>
-            </a:r>
-          </a:p>
-          <a:p>
-            <a:pPr>
-              <a:spcAft>
-                <a:spcPts val="600"/>
-              </a:spcAft>
-            </a:pPr>
-            <a:r>
-              <a:rPr sz="1500">
-                <a:solidFill>
-                  <a:srgbClr val="22282E"/>
-                </a:solidFill>
-              </a:rPr>
-              <a:t>•  CVE/CWE watching: seguir vulnerabilidades y debilidades nuevas. Característica: mantiene tu conocimiento vigente.</a:t>
-            </a:r>
-          </a:p>
-          <a:p>
-            <a:pPr>
-              <a:spcAft>
-                <a:spcPts val="600"/>
-              </a:spcAft>
-            </a:pPr>
-            <a:r>
-              <a:rPr sz="1500">
-                <a:solidFill>
-                  <a:srgbClr val="22282E"/>
-                </a:solidFill>
-              </a:rPr>
-              <a:t>•  Contribución open source: aportar a herramientas de la comunidad. Característica: aprendizaje profundo y reputación.</a:t>
-            </a:r>
-          </a:p>
-          <a:p>
-            <a:pPr>
-              <a:spcAft>
-                <a:spcPts val="600"/>
-              </a:spcAft>
-            </a:pPr>
-            <a:r>
-              <a:rPr sz="1500">
-                <a:solidFill>
-                  <a:srgbClr val="22282E"/>
-                </a:solidFill>
-              </a:rPr>
-              <a:t>•  Burnout: agotamiento por sobrecarga sostenida. Característica: riesgo real del sector; se previene con límites.</a:t>
+              <a:t>•  Aprender continuamente es un bucle de objetivos, práctica deliberada, recuperación y revisión. Consumir contenido no equivale a habilidad. La clase convierte el objetivo en una evidencia evaluable…</a:t>
+            </a:r>
+          </a:p>
+          <a:p>
+            <a:pPr>
+              <a:spcAft>
+                <a:spcPts val="600"/>
+              </a:spcAft>
+            </a:pPr>
+            <a:r>
+              <a:rPr sz="1500">
+                <a:solidFill>
+                  <a:srgbClr val="22282E"/>
+                </a:solidFill>
+              </a:rPr>
+              <a:t>•  El plan semanal falla por sobrecarga. Se reduce alcance, protege descanso y conserva una evidencia pequeña pero terminada.</a:t>
             </a:r>
           </a:p>
         </p:txBody>
@@ -4271,7 +4737,7 @@
                   <a:srgbClr val="0B3D2E"/>
                 </a:solidFill>
               </a:rPr>
-              <a:t>🧰 Herramientas y preparación</a:t>
+              <a:t>📔 Glosario operativo</a:t>
             </a:r>
           </a:p>
         </p:txBody>
@@ -4309,67 +4775,52 @@
                   <a:srgbClr val="22282E"/>
                 </a:solidFill>
               </a:rPr>
-              <a:t>•  Lector RSS (Feedly/Miniflux) para agregar fuentes de calidad.</a:t>
-            </a:r>
-          </a:p>
-          <a:p>
-            <a:pPr>
-              <a:spcAft>
-                <a:spcPts val="600"/>
-              </a:spcAft>
-            </a:pPr>
-            <a:r>
-              <a:rPr sz="1500">
-                <a:solidFill>
-                  <a:srgbClr val="22282E"/>
-                </a:solidFill>
-              </a:rPr>
-              <a:t>•  Plataformas de práctica continua: HackTheBox, TryHackMe, PortSwigger Academy, CTFtime.</a:t>
-            </a:r>
-          </a:p>
-          <a:p>
-            <a:pPr>
-              <a:spcAft>
-                <a:spcPts val="600"/>
-              </a:spcAft>
-            </a:pPr>
-            <a:r>
-              <a:rPr sz="1500">
-                <a:solidFill>
-                  <a:srgbClr val="22282E"/>
-                </a:solidFill>
-              </a:rPr>
-              <a:t>•  Comunidad: Discord/Slack del sector, meetups locales, conferencias (DEF CON, BSides, OWASP chapters).</a:t>
-            </a:r>
-          </a:p>
-          <a:p>
-            <a:pPr>
-              <a:spcAft>
-                <a:spcPts val="600"/>
-              </a:spcAft>
-            </a:pPr>
-            <a:r>
-              <a:rPr sz="1500">
-                <a:solidFill>
-                  <a:srgbClr val="22282E"/>
-                </a:solidFill>
-              </a:rPr>
-              <a:t>•  Un sistema de notas (Obsidian) para tu "segundo cerebro" de seguridad.</a:t>
-            </a:r>
-          </a:p>
-          <a:p>
-            <a:pPr>
-              <a:spcAft>
-                <a:spcPts val="600"/>
-              </a:spcAft>
-            </a:pPr>
-            <a:r>
-              <a:rPr sz="1500">
-                <a:solidFill>
-                  <a:srgbClr val="22282E"/>
-                </a:solidFill>
-              </a:rPr>
-              <a:t>•  Una plantilla de plan trimestral (objetivos, recursos, métrica).</a:t>
+              <a:t>•  Término — Definición</a:t>
+            </a:r>
+          </a:p>
+          <a:p>
+            <a:pPr>
+              <a:spcAft>
+                <a:spcPts val="600"/>
+              </a:spcAft>
+            </a:pPr>
+            <a:r>
+              <a:rPr sz="1500">
+                <a:solidFill>
+                  <a:srgbClr val="22282E"/>
+                </a:solidFill>
+              </a:rPr>
+              <a:t>•  Práctica deliberada — Ejercicio enfocado con feedback y dificultad calibrada.</a:t>
+            </a:r>
+          </a:p>
+          <a:p>
+            <a:pPr>
+              <a:spcAft>
+                <a:spcPts val="600"/>
+              </a:spcAft>
+            </a:pPr>
+            <a:r>
+              <a:rPr sz="1500">
+                <a:solidFill>
+                  <a:srgbClr val="22282E"/>
+                </a:solidFill>
+              </a:rPr>
+              <a:t>•  Evidencia — Resultado que otra persona puede revisar y relacionar con un criterio.</a:t>
+            </a:r>
+          </a:p>
+          <a:p>
+            <a:pPr>
+              <a:spcAft>
+                <a:spcPts val="600"/>
+              </a:spcAft>
+            </a:pPr>
+            <a:r>
+              <a:rPr sz="1500">
+                <a:solidFill>
+                  <a:srgbClr val="22282E"/>
+                </a:solidFill>
+              </a:rPr>
+              <a:t>•  Retrospectiva — Revisión de decisiones, límites y siguiente mejora.</a:t>
             </a:r>
           </a:p>
         </p:txBody>
@@ -4420,7 +4871,7 @@
                   <a:srgbClr val="0B3D2E"/>
                 </a:solidFill>
               </a:rPr>
-              <a:t>🧪 Laboratorio guiado (ejercicio aplicado)</a:t>
+              <a:t>✅ Criterio de dominio</a:t>
             </a:r>
           </a:p>
         </p:txBody>
@@ -4458,97 +4909,7 @@
                   <a:srgbClr val="22282E"/>
                 </a:solidFill>
               </a:rPr>
-              <a:t>•  Curación de fuentes. Selecciona 8–12 fuentes fiables (blogs de investigadores, avisos oficiales, newsletters, MITRE/OWASP) y agrégalas en tu lector RSS.</a:t>
-            </a:r>
-          </a:p>
-          <a:p>
-            <a:pPr>
-              <a:spcAft>
-                <a:spcPts val="600"/>
-              </a:spcAft>
-            </a:pPr>
-            <a:r>
-              <a:rPr sz="1500">
-                <a:solidFill>
-                  <a:srgbClr val="22282E"/>
-                </a:solidFill>
-              </a:rPr>
-              <a:t>•  Define tu cadencia. Fija bloques semanales realistas: p. ej. 3 h de práctica (HTB/THM), 1 h de lectura, 1 h de escritura.</a:t>
-            </a:r>
-          </a:p>
-          <a:p>
-            <a:pPr>
-              <a:spcAft>
-                <a:spcPts val="600"/>
-              </a:spcAft>
-            </a:pPr>
-            <a:r>
-              <a:rPr sz="1500">
-                <a:solidFill>
-                  <a:srgbClr val="22282E"/>
-                </a:solidFill>
-              </a:rPr>
-              <a:t>•  Plan trimestral. Elige un objetivo por trimestre (una certificación, una especialización, N máquinas) con métrica verificable.</a:t>
-            </a:r>
-          </a:p>
-          <a:p>
-            <a:pPr>
-              <a:spcAft>
-                <a:spcPts val="600"/>
-              </a:spcAft>
-            </a:pPr>
-            <a:r>
-              <a:rPr sz="1500">
-                <a:solidFill>
-                  <a:srgbClr val="22282E"/>
-                </a:solidFill>
-              </a:rPr>
-              <a:t>•  Únete a una comunidad. Entra a un Discord/meetup y participa: pregunta, responde, comparte un writeup.</a:t>
-            </a:r>
-          </a:p>
-          <a:p>
-            <a:pPr>
-              <a:spcAft>
-                <a:spcPts val="600"/>
-              </a:spcAft>
-            </a:pPr>
-            <a:r>
-              <a:rPr sz="1500">
-                <a:solidFill>
-                  <a:srgbClr val="22282E"/>
-                </a:solidFill>
-              </a:rPr>
-              <a:t>•  Planifica una contribución. Define un aporte a 90 días: un post técnico, una charla en un BSides local o un PR a una herramienta open source.</a:t>
-            </a:r>
-          </a:p>
-          <a:p>
-            <a:pPr>
-              <a:spcAft>
-                <a:spcPts val="600"/>
-              </a:spcAft>
-            </a:pPr>
-            <a:r>
-              <a:rPr sz="1500">
-                <a:solidFill>
-                  <a:srgbClr val="22282E"/>
-                </a:solidFill>
-              </a:rPr>
-              <a:t>•  Traza tu especialización. Con el NICE Framework, elige un rol objetivo (p. ej. Exploitation Analyst, Cyber Defense Analyst) y lista las competencias a profundizar.</a:t>
-            </a:r>
-          </a:p>
-          <a:p>
-            <a:pPr>
-              <a:spcAft>
-                <a:spcPts val="600"/>
-              </a:spcAft>
-            </a:pPr>
-            <a:r>
-              <a:rPr sz="1500">
-                <a:solidFill>
-                  <a:srgbClr val="22282E"/>
-                </a:solidFill>
-              </a:rPr>
-              <a:t>•  Diseña sostenibilidad. Define límites (horarios, descansos) para prevenir burnout; el plan debe durar años, no semanas.</a:t>
+              <a:t>•  El alumno domina la clase cuando planifica, ejecuta y comunica una evidencia completa, respeta alcance y puede defender sus decisiones ante una revisión.</a:t>
             </a:r>
           </a:p>
         </p:txBody>
@@ -4599,7 +4960,7 @@
                   <a:srgbClr val="0B3D2E"/>
                 </a:solidFill>
               </a:rPr>
-              <a:t>✍️ Ejercicios</a:t>
+              <a:t>📖 Definiciones y características</a:t>
             </a:r>
           </a:p>
         </p:txBody>
@@ -4637,82 +4998,82 @@
                   <a:srgbClr val="22282E"/>
                 </a:solidFill>
               </a:rPr>
-              <a:t>•  Construye tu lista curada de 10 fuentes con su justificación.</a:t>
-            </a:r>
-          </a:p>
-          <a:p>
-            <a:pPr>
-              <a:spcAft>
-                <a:spcPts val="600"/>
-              </a:spcAft>
-            </a:pPr>
-            <a:r>
-              <a:rPr sz="1500">
-                <a:solidFill>
-                  <a:srgbClr val="22282E"/>
-                </a:solidFill>
-              </a:rPr>
-              <a:t>•  Diseña tu calendario semanal de práctica.</a:t>
-            </a:r>
-          </a:p>
-          <a:p>
-            <a:pPr>
-              <a:spcAft>
-                <a:spcPts val="600"/>
-              </a:spcAft>
-            </a:pPr>
-            <a:r>
-              <a:rPr sz="1500">
-                <a:solidFill>
-                  <a:srgbClr val="22282E"/>
-                </a:solidFill>
-              </a:rPr>
-              <a:t>•  Redacta tu plan trimestral con objetivo y métrica.</a:t>
-            </a:r>
-          </a:p>
-          <a:p>
-            <a:pPr>
-              <a:spcAft>
-                <a:spcPts val="600"/>
-              </a:spcAft>
-            </a:pPr>
-            <a:r>
-              <a:rPr sz="1500">
-                <a:solidFill>
-                  <a:srgbClr val="22282E"/>
-                </a:solidFill>
-              </a:rPr>
-              <a:t>•  Únete a una comunidad y documenta tu primera contribución.</a:t>
-            </a:r>
-          </a:p>
-          <a:p>
-            <a:pPr>
-              <a:spcAft>
-                <a:spcPts val="600"/>
-              </a:spcAft>
-            </a:pPr>
-            <a:r>
-              <a:rPr sz="1500">
-                <a:solidFill>
-                  <a:srgbClr val="22282E"/>
-                </a:solidFill>
-              </a:rPr>
-              <a:t>•  Mapea tu rol objetivo con el NICE Framework.</a:t>
-            </a:r>
-          </a:p>
-          <a:p>
-            <a:pPr>
-              <a:spcAft>
-                <a:spcPts val="600"/>
-              </a:spcAft>
-            </a:pPr>
-            <a:r>
-              <a:rPr sz="1500">
-                <a:solidFill>
-                  <a:srgbClr val="22282E"/>
-                </a:solidFill>
-              </a:rPr>
-              <a:t>•  Escribe tu "regla de sostenibilidad" personal contra el burnout.</a:t>
+              <a:t>•  Aprendizaje continuo: hábito estructurado de estudio y práctica permanente. Característica: cadencia sostenible, no maratones esporádicos.</a:t>
+            </a:r>
+          </a:p>
+          <a:p>
+            <a:pPr>
+              <a:spcAft>
+                <a:spcPts val="600"/>
+              </a:spcAft>
+            </a:pPr>
+            <a:r>
+              <a:rPr sz="1500">
+                <a:solidFill>
+                  <a:srgbClr val="22282E"/>
+                </a:solidFill>
+              </a:rPr>
+              <a:t>•  NICE Framework: taxonomía de roles y competencias de ciberseguridad (NIST). Característica: ayuda a mapear tu especialización.</a:t>
+            </a:r>
+          </a:p>
+          <a:p>
+            <a:pPr>
+              <a:spcAft>
+                <a:spcPts val="600"/>
+              </a:spcAft>
+            </a:pPr>
+            <a:r>
+              <a:rPr sz="1500">
+                <a:solidFill>
+                  <a:srgbClr val="22282E"/>
+                </a:solidFill>
+              </a:rPr>
+              <a:t>•  CTF (Capture The Flag): competición de retos técnicos. Característica: práctica gamificada y comunitaria.</a:t>
+            </a:r>
+          </a:p>
+          <a:p>
+            <a:pPr>
+              <a:spcAft>
+                <a:spcPts val="600"/>
+              </a:spcAft>
+            </a:pPr>
+            <a:r>
+              <a:rPr sz="1500">
+                <a:solidFill>
+                  <a:srgbClr val="22282E"/>
+                </a:solidFill>
+              </a:rPr>
+              <a:t>•  CVE/CWE watching: seguir vulnerabilidades y debilidades nuevas. Característica: mantiene tu conocimiento vigente.</a:t>
+            </a:r>
+          </a:p>
+          <a:p>
+            <a:pPr>
+              <a:spcAft>
+                <a:spcPts val="600"/>
+              </a:spcAft>
+            </a:pPr>
+            <a:r>
+              <a:rPr sz="1500">
+                <a:solidFill>
+                  <a:srgbClr val="22282E"/>
+                </a:solidFill>
+              </a:rPr>
+              <a:t>•  Contribución open source: aportar a herramientas de la comunidad. Característica: aprendizaje profundo y reputación.</a:t>
+            </a:r>
+          </a:p>
+          <a:p>
+            <a:pPr>
+              <a:spcAft>
+                <a:spcPts val="600"/>
+              </a:spcAft>
+            </a:pPr>
+            <a:r>
+              <a:rPr sz="1500">
+                <a:solidFill>
+                  <a:srgbClr val="22282E"/>
+                </a:solidFill>
+              </a:rPr>
+              <a:t>•  Burnout: agotamiento por sobrecarga sostenida. Característica: riesgo real del sector; se previene con límites.</a:t>
             </a:r>
           </a:p>
         </p:txBody>
@@ -4763,7 +5124,7 @@
                   <a:srgbClr val="0B3D2E"/>
                 </a:solidFill>
               </a:rPr>
-              <a:t>📝 Reto verificable</a:t>
+              <a:t>🧰 Herramientas y preparación</a:t>
             </a:r>
           </a:p>
         </p:txBody>
@@ -4801,22 +5162,67 @@
                   <a:srgbClr val="22282E"/>
                 </a:solidFill>
               </a:rPr>
-              <a:t>•  Entrega un plan de aprendizaje continuo (plan-aprendizaje.md) con: fuentes curadas, cadencia semanal, objetivos trimestrales a 12 meses con métricas, un compromiso de contribución a 90 días, tu ruta de especialización (NICE) y tus límites de sostenibilidad.</a:t>
-            </a:r>
-          </a:p>
-          <a:p>
-            <a:pPr>
-              <a:spcAft>
-                <a:spcPts val="600"/>
-              </a:spcAft>
-            </a:pPr>
-            <a:r>
-              <a:rPr sz="1500">
-                <a:solidFill>
-                  <a:srgbClr val="22282E"/>
-                </a:solidFill>
-              </a:rPr>
-              <a:t>•  Criterio de aceptación: el plan tiene fechas y métricas verificables (no intenciones vagas), incluye al menos una contribución concreta a la comunidad, mapea una especialización a un rol real y contempla explícitamente la prevención del burnout.</a:t>
+              <a:t>•  Lector RSS (Feedly/Miniflux) para agregar fuentes de calidad.</a:t>
+            </a:r>
+          </a:p>
+          <a:p>
+            <a:pPr>
+              <a:spcAft>
+                <a:spcPts val="600"/>
+              </a:spcAft>
+            </a:pPr>
+            <a:r>
+              <a:rPr sz="1500">
+                <a:solidFill>
+                  <a:srgbClr val="22282E"/>
+                </a:solidFill>
+              </a:rPr>
+              <a:t>•  Plataformas de práctica continua: HackTheBox, TryHackMe, PortSwigger Academy, CTFtime.</a:t>
+            </a:r>
+          </a:p>
+          <a:p>
+            <a:pPr>
+              <a:spcAft>
+                <a:spcPts val="600"/>
+              </a:spcAft>
+            </a:pPr>
+            <a:r>
+              <a:rPr sz="1500">
+                <a:solidFill>
+                  <a:srgbClr val="22282E"/>
+                </a:solidFill>
+              </a:rPr>
+              <a:t>•  Comunidad: Discord/Slack del sector, meetups locales, conferencias (DEF CON, BSides, OWASP chapters).</a:t>
+            </a:r>
+          </a:p>
+          <a:p>
+            <a:pPr>
+              <a:spcAft>
+                <a:spcPts val="600"/>
+              </a:spcAft>
+            </a:pPr>
+            <a:r>
+              <a:rPr sz="1500">
+                <a:solidFill>
+                  <a:srgbClr val="22282E"/>
+                </a:solidFill>
+              </a:rPr>
+              <a:t>•  Un sistema de notas (Obsidian) para tu "segundo cerebro" de seguridad.</a:t>
+            </a:r>
+          </a:p>
+          <a:p>
+            <a:pPr>
+              <a:spcAft>
+                <a:spcPts val="600"/>
+              </a:spcAft>
+            </a:pPr>
+            <a:r>
+              <a:rPr sz="1500">
+                <a:solidFill>
+                  <a:srgbClr val="22282E"/>
+                </a:solidFill>
+              </a:rPr>
+              <a:t>•  Una plantilla de plan trimestral (objetivos, recursos, métrica).</a:t>
             </a:r>
           </a:p>
         </p:txBody>
